--- a/presentation/Challenge2_Group5_HandymanPortfolio.pptx
+++ b/presentation/Challenge2_Group5_HandymanPortfolio.pptx
@@ -3145,7 +3145,7 @@
           </a:p>
           <a:p>
             <a:r>
-              <a:t>Liang Mingchen · May 27, 2026</a:t>
+              <a:t>May 27, 2026</a:t>
             </a:r>
           </a:p>
         </p:txBody>
